--- a/pptx-asset-library/decks/01_tables/TBL_bulk_check_v1.pptx
+++ b/pptx-asset-library/decks/01_tables/TBL_bulk_check_v1.pptx
@@ -3187,7 +3187,7 @@
           <a:graphicData uri="http://schemas.openxmlformats.org/drawingml/2006/table">
             <a:tbl>
               <a:tblPr>
-                <a:tableStyleId>{2D5ABB26-0587-4C30-8999-92F81FD0307C}</a:tableStyleId>
+                <a:tableStyleId>{5C22544A-7EE6-4342-B048-85BDC9FD1C3A}</a:tableStyleId>
               </a:tblPr>
               <a:tblGrid>
                 <a:gridCol w="3840480"/>
@@ -4254,7 +4254,7 @@
           <a:graphicData uri="http://schemas.openxmlformats.org/drawingml/2006/table">
             <a:tbl>
               <a:tblPr>
-                <a:tableStyleId>{2D5ABB26-0587-4C30-8999-92F81FD0307C}</a:tableStyleId>
+                <a:tableStyleId>{5C22544A-7EE6-4342-B048-85BDC9FD1C3A}</a:tableStyleId>
               </a:tblPr>
               <a:tblGrid>
                 <a:gridCol w="3840480"/>
@@ -5547,7 +5547,7 @@
           <a:graphicData uri="http://schemas.openxmlformats.org/drawingml/2006/table">
             <a:tbl>
               <a:tblPr>
-                <a:tableStyleId>{2D5ABB26-0587-4C30-8999-92F81FD0307C}</a:tableStyleId>
+                <a:tableStyleId>{5C22544A-7EE6-4342-B048-85BDC9FD1C3A}</a:tableStyleId>
               </a:tblPr>
               <a:tblGrid>
                 <a:gridCol w="3840480"/>
@@ -6840,7 +6840,7 @@
           <a:graphicData uri="http://schemas.openxmlformats.org/drawingml/2006/table">
             <a:tbl>
               <a:tblPr>
-                <a:tableStyleId>{2D5ABB26-0587-4C30-8999-92F81FD0307C}</a:tableStyleId>
+                <a:tableStyleId>{5C22544A-7EE6-4342-B048-85BDC9FD1C3A}</a:tableStyleId>
               </a:tblPr>
               <a:tblGrid>
                 <a:gridCol w="3840480"/>
@@ -8089,7 +8089,7 @@
           <a:graphicData uri="http://schemas.openxmlformats.org/drawingml/2006/table">
             <a:tbl>
               <a:tblPr>
-                <a:tableStyleId>{2D5ABB26-0587-4C30-8999-92F81FD0307C}</a:tableStyleId>
+                <a:tableStyleId>{5C22544A-7EE6-4342-B048-85BDC9FD1C3A}</a:tableStyleId>
               </a:tblPr>
               <a:tblGrid>
                 <a:gridCol w="3840480"/>
@@ -9609,7 +9609,7 @@
           <a:graphicData uri="http://schemas.openxmlformats.org/drawingml/2006/table">
             <a:tbl>
               <a:tblPr>
-                <a:tableStyleId>{2D5ABB26-0587-4C30-8999-92F81FD0307C}</a:tableStyleId>
+                <a:tableStyleId>{5C22544A-7EE6-4342-B048-85BDC9FD1C3A}</a:tableStyleId>
               </a:tblPr>
               <a:tblGrid>
                 <a:gridCol w="3840480"/>
@@ -10676,7 +10676,7 @@
           <a:graphicData uri="http://schemas.openxmlformats.org/drawingml/2006/table">
             <a:tbl>
               <a:tblPr>
-                <a:tableStyleId>{2D5ABB26-0587-4C30-8999-92F81FD0307C}</a:tableStyleId>
+                <a:tableStyleId>{5C22544A-7EE6-4342-B048-85BDC9FD1C3A}</a:tableStyleId>
               </a:tblPr>
               <a:tblGrid>
                 <a:gridCol w="3840480"/>
@@ -11969,7 +11969,7 @@
           <a:graphicData uri="http://schemas.openxmlformats.org/drawingml/2006/table">
             <a:tbl>
               <a:tblPr>
-                <a:tableStyleId>{2D5ABB26-0587-4C30-8999-92F81FD0307C}</a:tableStyleId>
+                <a:tableStyleId>{5C22544A-7EE6-4342-B048-85BDC9FD1C3A}</a:tableStyleId>
               </a:tblPr>
               <a:tblGrid>
                 <a:gridCol w="3840480"/>
@@ -13218,7 +13218,7 @@
           <a:graphicData uri="http://schemas.openxmlformats.org/drawingml/2006/table">
             <a:tbl>
               <a:tblPr>
-                <a:tableStyleId>{2D5ABB26-0587-4C30-8999-92F81FD0307C}</a:tableStyleId>
+                <a:tableStyleId>{5C22544A-7EE6-4342-B048-85BDC9FD1C3A}</a:tableStyleId>
               </a:tblPr>
               <a:tblGrid>
                 <a:gridCol w="3840480"/>
@@ -14738,7 +14738,7 @@
           <a:graphicData uri="http://schemas.openxmlformats.org/drawingml/2006/table">
             <a:tbl>
               <a:tblPr>
-                <a:tableStyleId>{2D5ABB26-0587-4C30-8999-92F81FD0307C}</a:tableStyleId>
+                <a:tableStyleId>{5C22544A-7EE6-4342-B048-85BDC9FD1C3A}</a:tableStyleId>
               </a:tblPr>
               <a:tblGrid>
                 <a:gridCol w="3840480"/>
